--- a/AI Fundamentals Course/Week 2/Week2_Slides_Machine_Learning.pptx
+++ b/AI Fundamentals Course/Week 2/Week2_Slides_Machine_Learning.pptx
@@ -3250,6 +3250,10 @@
           </a:solidFill>
           <a:ln/>
         </p:spPr>
+        <p:txBody>
+          <a:bodyPr/>
+          <a:p/>
+        </p:txBody>
       </p:sp>
       <p:sp>
         <p:nvSpPr>
@@ -3541,6 +3545,10 @@
           </a:solidFill>
           <a:ln/>
         </p:spPr>
+        <p:txBody>
+          <a:bodyPr/>
+          <a:p/>
+        </p:txBody>
       </p:sp>
       <p:sp>
         <p:nvSpPr>
@@ -3832,6 +3840,10 @@
           </a:solidFill>
           <a:ln/>
         </p:spPr>
+        <p:txBody>
+          <a:bodyPr/>
+          <a:p/>
+        </p:txBody>
       </p:sp>
       <p:sp>
         <p:nvSpPr>
@@ -4123,6 +4135,10 @@
           </a:solidFill>
           <a:ln/>
         </p:spPr>
+        <p:txBody>
+          <a:bodyPr/>
+          <a:p/>
+        </p:txBody>
       </p:sp>
       <p:sp>
         <p:nvSpPr>
@@ -4531,6 +4547,10 @@
           </a:solidFill>
           <a:ln/>
         </p:spPr>
+        <p:txBody>
+          <a:bodyPr/>
+          <a:p/>
+        </p:txBody>
       </p:sp>
       <p:sp>
         <p:nvSpPr>
@@ -4932,6 +4952,10 @@
           </a:solidFill>
           <a:ln/>
         </p:spPr>
+        <p:txBody>
+          <a:bodyPr/>
+          <a:p/>
+        </p:txBody>
       </p:sp>
       <p:sp>
         <p:nvSpPr>
@@ -5262,6 +5286,10 @@
           </a:solidFill>
           <a:ln/>
         </p:spPr>
+        <p:txBody>
+          <a:bodyPr/>
+          <a:p/>
+        </p:txBody>
       </p:sp>
       <p:sp>
         <p:nvSpPr>
@@ -5593,6 +5621,10 @@
           </a:solidFill>
           <a:ln/>
         </p:spPr>
+        <p:txBody>
+          <a:bodyPr/>
+          <a:p/>
+        </p:txBody>
       </p:sp>
       <p:sp>
         <p:nvSpPr>
@@ -6034,6 +6066,10 @@
           </a:solidFill>
           <a:ln/>
         </p:spPr>
+        <p:txBody>
+          <a:bodyPr/>
+          <a:p/>
+        </p:txBody>
       </p:sp>
       <p:sp>
         <p:nvSpPr>
@@ -6403,6 +6439,10 @@
           </a:solidFill>
           <a:ln/>
         </p:spPr>
+        <p:txBody>
+          <a:bodyPr/>
+          <a:p/>
+        </p:txBody>
       </p:sp>
       <p:sp>
         <p:nvSpPr>
@@ -6734,6 +6774,10 @@
           </a:solidFill>
           <a:ln/>
         </p:spPr>
+        <p:txBody>
+          <a:bodyPr/>
+          <a:p/>
+        </p:txBody>
       </p:sp>
       <p:sp>
         <p:nvSpPr>
@@ -7102,6 +7146,10 @@
           </a:solidFill>
           <a:ln/>
         </p:spPr>
+        <p:txBody>
+          <a:bodyPr/>
+          <a:p/>
+        </p:txBody>
       </p:sp>
       <p:sp>
         <p:nvSpPr>
@@ -7431,6 +7479,10 @@
           </a:solidFill>
           <a:ln/>
         </p:spPr>
+        <p:txBody>
+          <a:bodyPr/>
+          <a:p/>
+        </p:txBody>
       </p:sp>
       <p:sp>
         <p:nvSpPr>
@@ -7982,6 +8034,10 @@
           </a:solidFill>
           <a:ln/>
         </p:spPr>
+        <p:txBody>
+          <a:bodyPr/>
+          <a:p/>
+        </p:txBody>
       </p:sp>
       <p:sp>
         <p:nvSpPr>
@@ -8233,6 +8289,10 @@
           </a:solidFill>
           <a:ln/>
         </p:spPr>
+        <p:txBody>
+          <a:bodyPr/>
+          <a:p/>
+        </p:txBody>
       </p:sp>
       <p:sp>
         <p:nvSpPr>
@@ -8564,6 +8624,10 @@
           </a:solidFill>
           <a:ln/>
         </p:spPr>
+        <p:txBody>
+          <a:bodyPr/>
+          <a:p/>
+        </p:txBody>
       </p:sp>
       <p:sp>
         <p:nvSpPr>
@@ -8972,6 +9036,10 @@
           </a:solidFill>
           <a:ln/>
         </p:spPr>
+        <p:txBody>
+          <a:bodyPr/>
+          <a:p/>
+        </p:txBody>
       </p:sp>
       <p:sp>
         <p:nvSpPr>
@@ -9261,6 +9329,10 @@
           </a:solidFill>
           <a:ln/>
         </p:spPr>
+        <p:txBody>
+          <a:bodyPr/>
+          <a:p/>
+        </p:txBody>
       </p:sp>
       <p:sp>
         <p:nvSpPr>
@@ -9589,6 +9661,10 @@
           </a:solidFill>
           <a:ln/>
         </p:spPr>
+        <p:txBody>
+          <a:bodyPr/>
+          <a:p/>
+        </p:txBody>
       </p:sp>
       <p:sp>
         <p:nvSpPr>
